--- a/FarmChain_X.pptx
+++ b/FarmChain_X.pptx
@@ -5,7 +5,7 @@
     <p:sldMasterId id="2147483755" r:id="rId1"/>
   </p:sldMasterIdLst>
   <p:notesMasterIdLst>
-    <p:notesMasterId r:id="rId8"/>
+    <p:notesMasterId r:id="rId14"/>
   </p:notesMasterIdLst>
   <p:sldIdLst>
     <p:sldId id="256" r:id="rId2"/>
@@ -13,7 +13,13 @@
     <p:sldId id="260" r:id="rId4"/>
     <p:sldId id="262" r:id="rId5"/>
     <p:sldId id="261" r:id="rId6"/>
-    <p:sldId id="258" r:id="rId7"/>
+    <p:sldId id="263" r:id="rId7"/>
+    <p:sldId id="264" r:id="rId8"/>
+    <p:sldId id="265" r:id="rId9"/>
+    <p:sldId id="266" r:id="rId10"/>
+    <p:sldId id="267" r:id="rId11"/>
+    <p:sldId id="268" r:id="rId12"/>
+    <p:sldId id="258" r:id="rId13"/>
   </p:sldIdLst>
   <p:sldSz cx="12192000" cy="6858000"/>
   <p:notesSz cx="6858000" cy="9144000"/>
@@ -210,7 +216,7 @@
           <a:p>
             <a:fld id="{5EF166FB-66E4-4AEF-A1AE-4114E38D35B7}" type="datetimeFigureOut">
               <a:rPr lang="en-IN" smtClean="0"/>
-              <a:t>24-03-2026</a:t>
+              <a:t>24-04-2026</a:t>
             </a:fld>
             <a:endParaRPr lang="en-IN"/>
           </a:p>
@@ -1208,7 +1214,7 @@
           <a:p>
             <a:fld id="{C2311BFE-F8D0-4A35-8440-05C2C7335602}" type="datetimeFigureOut">
               <a:rPr lang="en-IN" smtClean="0"/>
-              <a:t>24-03-2026</a:t>
+              <a:t>24-04-2026</a:t>
             </a:fld>
             <a:endParaRPr lang="en-IN"/>
           </a:p>
@@ -2328,7 +2334,7 @@
           <a:p>
             <a:fld id="{C2311BFE-F8D0-4A35-8440-05C2C7335602}" type="datetimeFigureOut">
               <a:rPr lang="en-IN" smtClean="0"/>
-              <a:t>24-03-2026</a:t>
+              <a:t>24-04-2026</a:t>
             </a:fld>
             <a:endParaRPr lang="en-IN"/>
           </a:p>
@@ -3339,7 +3345,7 @@
           <a:p>
             <a:fld id="{C2311BFE-F8D0-4A35-8440-05C2C7335602}" type="datetimeFigureOut">
               <a:rPr lang="en-IN" smtClean="0"/>
-              <a:t>24-03-2026</a:t>
+              <a:t>24-04-2026</a:t>
             </a:fld>
             <a:endParaRPr lang="en-IN"/>
           </a:p>
@@ -4509,7 +4515,7 @@
           <a:p>
             <a:fld id="{C2311BFE-F8D0-4A35-8440-05C2C7335602}" type="datetimeFigureOut">
               <a:rPr lang="en-IN" smtClean="0"/>
-              <a:t>24-03-2026</a:t>
+              <a:t>24-04-2026</a:t>
             </a:fld>
             <a:endParaRPr lang="en-IN"/>
           </a:p>
@@ -5570,7 +5576,7 @@
           <a:p>
             <a:fld id="{C2311BFE-F8D0-4A35-8440-05C2C7335602}" type="datetimeFigureOut">
               <a:rPr lang="en-IN" smtClean="0"/>
-              <a:t>24-03-2026</a:t>
+              <a:t>24-04-2026</a:t>
             </a:fld>
             <a:endParaRPr lang="en-IN"/>
           </a:p>
@@ -6216,7 +6222,7 @@
           <a:p>
             <a:fld id="{C2311BFE-F8D0-4A35-8440-05C2C7335602}" type="datetimeFigureOut">
               <a:rPr lang="en-IN" smtClean="0"/>
-              <a:t>24-03-2026</a:t>
+              <a:t>24-04-2026</a:t>
             </a:fld>
             <a:endParaRPr lang="en-IN"/>
           </a:p>
@@ -7063,7 +7069,7 @@
           <a:p>
             <a:fld id="{C2311BFE-F8D0-4A35-8440-05C2C7335602}" type="datetimeFigureOut">
               <a:rPr lang="en-IN" smtClean="0"/>
-              <a:t>24-03-2026</a:t>
+              <a:t>24-04-2026</a:t>
             </a:fld>
             <a:endParaRPr lang="en-IN"/>
           </a:p>
@@ -7238,7 +7244,7 @@
           <a:p>
             <a:fld id="{C2311BFE-F8D0-4A35-8440-05C2C7335602}" type="datetimeFigureOut">
               <a:rPr lang="en-IN" smtClean="0"/>
-              <a:t>24-03-2026</a:t>
+              <a:t>24-04-2026</a:t>
             </a:fld>
             <a:endParaRPr lang="en-IN"/>
           </a:p>
@@ -8236,7 +8242,7 @@
           <a:p>
             <a:fld id="{C2311BFE-F8D0-4A35-8440-05C2C7335602}" type="datetimeFigureOut">
               <a:rPr lang="en-IN" smtClean="0"/>
-              <a:t>24-03-2026</a:t>
+              <a:t>24-04-2026</a:t>
             </a:fld>
             <a:endParaRPr lang="en-IN"/>
           </a:p>
@@ -8477,7 +8483,7 @@
           <a:p>
             <a:fld id="{C2311BFE-F8D0-4A35-8440-05C2C7335602}" type="datetimeFigureOut">
               <a:rPr lang="en-IN" smtClean="0"/>
-              <a:t>24-03-2026</a:t>
+              <a:t>24-04-2026</a:t>
             </a:fld>
             <a:endParaRPr lang="en-IN"/>
           </a:p>
@@ -9539,7 +9545,7 @@
           <a:p>
             <a:fld id="{C2311BFE-F8D0-4A35-8440-05C2C7335602}" type="datetimeFigureOut">
               <a:rPr lang="en-IN" smtClean="0"/>
-              <a:t>24-03-2026</a:t>
+              <a:t>24-04-2026</a:t>
             </a:fld>
             <a:endParaRPr lang="en-IN"/>
           </a:p>
@@ -9811,7 +9817,7 @@
           <a:p>
             <a:fld id="{C2311BFE-F8D0-4A35-8440-05C2C7335602}" type="datetimeFigureOut">
               <a:rPr lang="en-IN" smtClean="0"/>
-              <a:t>24-03-2026</a:t>
+              <a:t>24-04-2026</a:t>
             </a:fld>
             <a:endParaRPr lang="en-IN"/>
           </a:p>
@@ -10193,7 +10199,7 @@
           <a:p>
             <a:fld id="{C2311BFE-F8D0-4A35-8440-05C2C7335602}" type="datetimeFigureOut">
               <a:rPr lang="en-IN" smtClean="0"/>
-              <a:t>24-03-2026</a:t>
+              <a:t>24-04-2026</a:t>
             </a:fld>
             <a:endParaRPr lang="en-IN"/>
           </a:p>
@@ -10311,7 +10317,7 @@
           <a:p>
             <a:fld id="{C2311BFE-F8D0-4A35-8440-05C2C7335602}" type="datetimeFigureOut">
               <a:rPr lang="en-IN" smtClean="0"/>
-              <a:t>24-03-2026</a:t>
+              <a:t>24-04-2026</a:t>
             </a:fld>
             <a:endParaRPr lang="en-IN"/>
           </a:p>
@@ -10406,7 +10412,7 @@
           <a:p>
             <a:fld id="{C2311BFE-F8D0-4A35-8440-05C2C7335602}" type="datetimeFigureOut">
               <a:rPr lang="en-IN" smtClean="0"/>
-              <a:t>24-03-2026</a:t>
+              <a:t>24-04-2026</a:t>
             </a:fld>
             <a:endParaRPr lang="en-IN"/>
           </a:p>
@@ -11515,7 +11521,7 @@
           <a:p>
             <a:fld id="{C2311BFE-F8D0-4A35-8440-05C2C7335602}" type="datetimeFigureOut">
               <a:rPr lang="en-IN" smtClean="0"/>
-              <a:t>24-03-2026</a:t>
+              <a:t>24-04-2026</a:t>
             </a:fld>
             <a:endParaRPr lang="en-IN"/>
           </a:p>
@@ -12648,7 +12654,7 @@
           <a:p>
             <a:fld id="{C2311BFE-F8D0-4A35-8440-05C2C7335602}" type="datetimeFigureOut">
               <a:rPr lang="en-IN" smtClean="0"/>
-              <a:t>24-03-2026</a:t>
+              <a:t>24-04-2026</a:t>
             </a:fld>
             <a:endParaRPr lang="en-IN"/>
           </a:p>
@@ -13676,7 +13682,7 @@
           <a:p>
             <a:fld id="{C2311BFE-F8D0-4A35-8440-05C2C7335602}" type="datetimeFigureOut">
               <a:rPr lang="en-IN" smtClean="0"/>
-              <a:t>24-03-2026</a:t>
+              <a:t>24-04-2026</a:t>
             </a:fld>
             <a:endParaRPr lang="en-IN"/>
           </a:p>
@@ -14224,6 +14230,22 @@
 <file path=ppt/slides/slide1.xml><?xml version="1.0" encoding="utf-8"?>
 <p:sld xmlns:a="http://schemas.openxmlformats.org/drawingml/2006/main" xmlns:r="http://schemas.openxmlformats.org/officeDocument/2006/relationships" xmlns:p="http://schemas.openxmlformats.org/presentationml/2006/main">
   <p:cSld>
+    <p:bg>
+      <p:bgPr>
+        <a:pattFill prst="pct5">
+          <a:fgClr>
+            <a:srgbClr val="92D050"/>
+          </a:fgClr>
+          <a:bgClr>
+            <a:schemeClr val="accent1">
+              <a:lumMod val="60000"/>
+              <a:lumOff val="40000"/>
+            </a:schemeClr>
+          </a:bgClr>
+        </a:pattFill>
+        <a:effectLst/>
+      </p:bgPr>
+    </p:bg>
     <p:spTree>
       <p:nvGrpSpPr>
         <p:cNvPr id="1" name=""/>
@@ -14311,11 +14333,18 @@
           <a:p>
             <a:pPr algn="ctr"/>
             <a:r>
+              <a:rPr lang="en-US">
+                <a:latin typeface="Times New Roman" panose="02020603050405020304" pitchFamily="18" charset="0"/>
+                <a:cs typeface="Times New Roman" panose="02020603050405020304" pitchFamily="18" charset="0"/>
+              </a:rPr>
+              <a:t>         Where </a:t>
+            </a:r>
+            <a:r>
               <a:rPr lang="en-US" dirty="0">
                 <a:latin typeface="Times New Roman" panose="02020603050405020304" pitchFamily="18" charset="0"/>
                 <a:cs typeface="Times New Roman" panose="02020603050405020304" pitchFamily="18" charset="0"/>
               </a:rPr>
-              <a:t>Where Every Harvest Speaks Its Journey</a:t>
+              <a:t>Every Harvest Speaks Its Journey</a:t>
             </a:r>
             <a:endParaRPr lang="en-IN" dirty="0">
               <a:latin typeface="Times New Roman" panose="02020603050405020304" pitchFamily="18" charset="0"/>
@@ -14337,9 +14366,366 @@
 </p:sld>
 </file>
 
+<file path=ppt/slides/slide10.xml><?xml version="1.0" encoding="utf-8"?>
+<p:sld xmlns:a="http://schemas.openxmlformats.org/drawingml/2006/main" xmlns:r="http://schemas.openxmlformats.org/officeDocument/2006/relationships" xmlns:p="http://schemas.openxmlformats.org/presentationml/2006/main">
+  <p:cSld>
+    <p:bg>
+      <p:bgPr>
+        <a:gradFill>
+          <a:gsLst>
+            <a:gs pos="0">
+              <a:schemeClr val="accent1">
+                <a:lumMod val="5000"/>
+                <a:lumOff val="95000"/>
+              </a:schemeClr>
+            </a:gs>
+            <a:gs pos="74000">
+              <a:schemeClr val="accent1">
+                <a:lumMod val="45000"/>
+                <a:lumOff val="55000"/>
+              </a:schemeClr>
+            </a:gs>
+            <a:gs pos="83000">
+              <a:schemeClr val="accent1">
+                <a:lumMod val="45000"/>
+                <a:lumOff val="55000"/>
+              </a:schemeClr>
+            </a:gs>
+            <a:gs pos="100000">
+              <a:schemeClr val="accent1">
+                <a:lumMod val="30000"/>
+                <a:lumOff val="70000"/>
+              </a:schemeClr>
+            </a:gs>
+          </a:gsLst>
+          <a:lin ang="5400000" scaled="1"/>
+        </a:gradFill>
+        <a:effectLst/>
+      </p:bgPr>
+    </p:bg>
+    <p:spTree>
+      <p:nvGrpSpPr>
+        <p:cNvPr id="1" name=""/>
+        <p:cNvGrpSpPr/>
+        <p:nvPr/>
+      </p:nvGrpSpPr>
+      <p:grpSpPr>
+        <a:xfrm>
+          <a:off x="0" y="0"/>
+          <a:ext cx="0" cy="0"/>
+          <a:chOff x="0" y="0"/>
+          <a:chExt cx="0" cy="0"/>
+        </a:xfrm>
+      </p:grpSpPr>
+      <p:pic>
+        <p:nvPicPr>
+          <p:cNvPr id="3" name="Picture 2">
+            <a:extLst>
+              <a:ext uri="{FF2B5EF4-FFF2-40B4-BE49-F238E27FC236}">
+                <a16:creationId xmlns:a16="http://schemas.microsoft.com/office/drawing/2014/main" id="{A5A8C836-8956-8370-84AC-F0DBB5DF6A5A}"/>
+              </a:ext>
+            </a:extLst>
+          </p:cNvPr>
+          <p:cNvPicPr>
+            <a:picLocks noChangeAspect="1"/>
+          </p:cNvPicPr>
+          <p:nvPr/>
+        </p:nvPicPr>
+        <p:blipFill>
+          <a:blip r:embed="rId2">
+            <a:extLst>
+              <a:ext uri="{28A0092B-C50C-407E-A947-70E740481C1C}">
+                <a14:useLocalDpi xmlns:a14="http://schemas.microsoft.com/office/drawing/2010/main" val="0"/>
+              </a:ext>
+            </a:extLst>
+          </a:blip>
+          <a:stretch>
+            <a:fillRect/>
+          </a:stretch>
+        </p:blipFill>
+        <p:spPr>
+          <a:xfrm>
+            <a:off x="1402080" y="0"/>
+            <a:ext cx="9042400" cy="6858000"/>
+          </a:xfrm>
+          <a:prstGeom prst="rect">
+            <a:avLst/>
+          </a:prstGeom>
+        </p:spPr>
+      </p:pic>
+    </p:spTree>
+    <p:extLst>
+      <p:ext uri="{BB962C8B-B14F-4D97-AF65-F5344CB8AC3E}">
+        <p14:creationId xmlns:p14="http://schemas.microsoft.com/office/powerpoint/2010/main" val="2453856258"/>
+      </p:ext>
+    </p:extLst>
+  </p:cSld>
+  <p:clrMapOvr>
+    <a:masterClrMapping/>
+  </p:clrMapOvr>
+</p:sld>
+</file>
+
+<file path=ppt/slides/slide11.xml><?xml version="1.0" encoding="utf-8"?>
+<p:sld xmlns:a="http://schemas.openxmlformats.org/drawingml/2006/main" xmlns:r="http://schemas.openxmlformats.org/officeDocument/2006/relationships" xmlns:p="http://schemas.openxmlformats.org/presentationml/2006/main">
+  <p:cSld>
+    <p:bg>
+      <p:bgPr>
+        <a:gradFill>
+          <a:gsLst>
+            <a:gs pos="0">
+              <a:schemeClr val="accent1">
+                <a:lumMod val="5000"/>
+                <a:lumOff val="95000"/>
+              </a:schemeClr>
+            </a:gs>
+            <a:gs pos="74000">
+              <a:schemeClr val="accent1">
+                <a:lumMod val="45000"/>
+                <a:lumOff val="55000"/>
+              </a:schemeClr>
+            </a:gs>
+            <a:gs pos="83000">
+              <a:schemeClr val="accent1">
+                <a:lumMod val="45000"/>
+                <a:lumOff val="55000"/>
+              </a:schemeClr>
+            </a:gs>
+            <a:gs pos="100000">
+              <a:schemeClr val="accent1">
+                <a:lumMod val="30000"/>
+                <a:lumOff val="70000"/>
+              </a:schemeClr>
+            </a:gs>
+          </a:gsLst>
+          <a:lin ang="5400000" scaled="1"/>
+        </a:gradFill>
+        <a:effectLst/>
+      </p:bgPr>
+    </p:bg>
+    <p:spTree>
+      <p:nvGrpSpPr>
+        <p:cNvPr id="1" name=""/>
+        <p:cNvGrpSpPr/>
+        <p:nvPr/>
+      </p:nvGrpSpPr>
+      <p:grpSpPr>
+        <a:xfrm>
+          <a:off x="0" y="0"/>
+          <a:ext cx="0" cy="0"/>
+          <a:chOff x="0" y="0"/>
+          <a:chExt cx="0" cy="0"/>
+        </a:xfrm>
+      </p:grpSpPr>
+      <p:pic>
+        <p:nvPicPr>
+          <p:cNvPr id="3" name="Picture 2">
+            <a:extLst>
+              <a:ext uri="{FF2B5EF4-FFF2-40B4-BE49-F238E27FC236}">
+                <a16:creationId xmlns:a16="http://schemas.microsoft.com/office/drawing/2014/main" id="{85D4E812-30EB-33D6-76B8-63F767D71532}"/>
+              </a:ext>
+            </a:extLst>
+          </p:cNvPr>
+          <p:cNvPicPr>
+            <a:picLocks noChangeAspect="1"/>
+          </p:cNvPicPr>
+          <p:nvPr/>
+        </p:nvPicPr>
+        <p:blipFill>
+          <a:blip r:embed="rId2">
+            <a:extLst>
+              <a:ext uri="{28A0092B-C50C-407E-A947-70E740481C1C}">
+                <a14:useLocalDpi xmlns:a14="http://schemas.microsoft.com/office/drawing/2010/main" val="0"/>
+              </a:ext>
+            </a:extLst>
+          </a:blip>
+          <a:stretch>
+            <a:fillRect/>
+          </a:stretch>
+        </p:blipFill>
+        <p:spPr>
+          <a:xfrm>
+            <a:off x="2113280" y="0"/>
+            <a:ext cx="8331200" cy="6858000"/>
+          </a:xfrm>
+          <a:prstGeom prst="rect">
+            <a:avLst/>
+          </a:prstGeom>
+        </p:spPr>
+      </p:pic>
+    </p:spTree>
+    <p:extLst>
+      <p:ext uri="{BB962C8B-B14F-4D97-AF65-F5344CB8AC3E}">
+        <p14:creationId xmlns:p14="http://schemas.microsoft.com/office/powerpoint/2010/main" val="690153971"/>
+      </p:ext>
+    </p:extLst>
+  </p:cSld>
+  <p:clrMapOvr>
+    <a:masterClrMapping/>
+  </p:clrMapOvr>
+</p:sld>
+</file>
+
+<file path=ppt/slides/slide12.xml><?xml version="1.0" encoding="utf-8"?>
+<p:sld xmlns:a="http://schemas.openxmlformats.org/drawingml/2006/main" xmlns:r="http://schemas.openxmlformats.org/officeDocument/2006/relationships" xmlns:p="http://schemas.openxmlformats.org/presentationml/2006/main">
+  <p:cSld>
+    <p:bg>
+      <p:bgPr>
+        <a:gradFill>
+          <a:gsLst>
+            <a:gs pos="74000">
+              <a:schemeClr val="accent1">
+                <a:lumMod val="45000"/>
+                <a:lumOff val="55000"/>
+              </a:schemeClr>
+            </a:gs>
+            <a:gs pos="83000">
+              <a:schemeClr val="accent1">
+                <a:lumMod val="45000"/>
+                <a:lumOff val="55000"/>
+              </a:schemeClr>
+            </a:gs>
+            <a:gs pos="100000">
+              <a:schemeClr val="accent1">
+                <a:lumMod val="30000"/>
+                <a:lumOff val="70000"/>
+              </a:schemeClr>
+            </a:gs>
+          </a:gsLst>
+          <a:lin ang="5400000" scaled="1"/>
+        </a:gradFill>
+        <a:effectLst/>
+      </p:bgPr>
+    </p:bg>
+    <p:spTree>
+      <p:nvGrpSpPr>
+        <p:cNvPr id="1" name=""/>
+        <p:cNvGrpSpPr/>
+        <p:nvPr/>
+      </p:nvGrpSpPr>
+      <p:grpSpPr>
+        <a:xfrm>
+          <a:off x="0" y="0"/>
+          <a:ext cx="0" cy="0"/>
+          <a:chOff x="0" y="0"/>
+          <a:chExt cx="0" cy="0"/>
+        </a:xfrm>
+      </p:grpSpPr>
+      <p:sp>
+        <p:nvSpPr>
+          <p:cNvPr id="2" name="Title 1">
+            <a:extLst>
+              <a:ext uri="{FF2B5EF4-FFF2-40B4-BE49-F238E27FC236}">
+                <a16:creationId xmlns:a16="http://schemas.microsoft.com/office/drawing/2014/main" id="{3E6838F1-6D03-AA00-066D-1AB806536982}"/>
+              </a:ext>
+            </a:extLst>
+          </p:cNvPr>
+          <p:cNvSpPr>
+            <a:spLocks noGrp="1"/>
+          </p:cNvSpPr>
+          <p:nvPr>
+            <p:ph type="title"/>
+          </p:nvPr>
+        </p:nvSpPr>
+        <p:spPr>
+          <a:xfrm>
+            <a:off x="4119716" y="2370667"/>
+            <a:ext cx="5860898" cy="1822514"/>
+          </a:xfrm>
+        </p:spPr>
+        <p:txBody>
+          <a:bodyPr/>
+          <a:lstStyle/>
+          <a:p>
+            <a:r>
+              <a:rPr lang="en-US" sz="7800" dirty="0">
+                <a:latin typeface="Times New Roman" panose="02020603050405020304" pitchFamily="18" charset="0"/>
+                <a:cs typeface="Times New Roman" panose="02020603050405020304" pitchFamily="18" charset="0"/>
+              </a:rPr>
+              <a:t>Thank you!</a:t>
+            </a:r>
+            <a:endParaRPr lang="en-IN" sz="7800" dirty="0">
+              <a:latin typeface="Times New Roman" panose="02020603050405020304" pitchFamily="18" charset="0"/>
+              <a:cs typeface="Times New Roman" panose="02020603050405020304" pitchFamily="18" charset="0"/>
+            </a:endParaRPr>
+          </a:p>
+        </p:txBody>
+      </p:sp>
+      <p:sp>
+        <p:nvSpPr>
+          <p:cNvPr id="3" name="Text Placeholder 2">
+            <a:extLst>
+              <a:ext uri="{FF2B5EF4-FFF2-40B4-BE49-F238E27FC236}">
+                <a16:creationId xmlns:a16="http://schemas.microsoft.com/office/drawing/2014/main" id="{7E71E8CE-37A5-AC7E-AB3C-02CAC0C0DC91}"/>
+              </a:ext>
+            </a:extLst>
+          </p:cNvPr>
+          <p:cNvSpPr>
+            <a:spLocks noGrp="1"/>
+          </p:cNvSpPr>
+          <p:nvPr>
+            <p:ph type="body" idx="1"/>
+          </p:nvPr>
+        </p:nvSpPr>
+        <p:spPr/>
+        <p:txBody>
+          <a:bodyPr/>
+          <a:lstStyle/>
+          <a:p>
+            <a:endParaRPr lang="en-IN"/>
+          </a:p>
+        </p:txBody>
+      </p:sp>
+    </p:spTree>
+    <p:extLst>
+      <p:ext uri="{BB962C8B-B14F-4D97-AF65-F5344CB8AC3E}">
+        <p14:creationId xmlns:p14="http://schemas.microsoft.com/office/powerpoint/2010/main" val="2285915830"/>
+      </p:ext>
+    </p:extLst>
+  </p:cSld>
+  <p:clrMapOvr>
+    <a:masterClrMapping/>
+  </p:clrMapOvr>
+</p:sld>
+</file>
+
 <file path=ppt/slides/slide2.xml><?xml version="1.0" encoding="utf-8"?>
 <p:sld xmlns:a="http://schemas.openxmlformats.org/drawingml/2006/main" xmlns:r="http://schemas.openxmlformats.org/officeDocument/2006/relationships" xmlns:p="http://schemas.openxmlformats.org/presentationml/2006/main">
   <p:cSld>
+    <p:bg>
+      <p:bgPr>
+        <a:gradFill>
+          <a:gsLst>
+            <a:gs pos="0">
+              <a:schemeClr val="accent1">
+                <a:lumMod val="5000"/>
+                <a:lumOff val="95000"/>
+              </a:schemeClr>
+            </a:gs>
+            <a:gs pos="74000">
+              <a:schemeClr val="accent1">
+                <a:lumMod val="45000"/>
+                <a:lumOff val="55000"/>
+              </a:schemeClr>
+            </a:gs>
+            <a:gs pos="83000">
+              <a:schemeClr val="accent1">
+                <a:lumMod val="45000"/>
+                <a:lumOff val="55000"/>
+              </a:schemeClr>
+            </a:gs>
+            <a:gs pos="100000">
+              <a:schemeClr val="accent1">
+                <a:lumMod val="30000"/>
+                <a:lumOff val="70000"/>
+              </a:schemeClr>
+            </a:gs>
+          </a:gsLst>
+          <a:lin ang="5400000" scaled="1"/>
+        </a:gradFill>
+        <a:effectLst/>
+      </p:bgPr>
+    </p:bg>
     <p:spTree>
       <p:nvGrpSpPr>
         <p:cNvPr id="1" name=""/>
@@ -14446,6 +14832,34 @@
 <file path=ppt/slides/slide3.xml><?xml version="1.0" encoding="utf-8"?>
 <p:sld xmlns:a="http://schemas.openxmlformats.org/drawingml/2006/main" xmlns:r="http://schemas.openxmlformats.org/officeDocument/2006/relationships" xmlns:p="http://schemas.openxmlformats.org/presentationml/2006/main">
   <p:cSld>
+    <p:bg>
+      <p:bgPr>
+        <a:gradFill>
+          <a:gsLst>
+            <a:gs pos="74000">
+              <a:schemeClr val="accent1">
+                <a:lumMod val="45000"/>
+                <a:lumOff val="55000"/>
+              </a:schemeClr>
+            </a:gs>
+            <a:gs pos="83000">
+              <a:schemeClr val="accent1">
+                <a:lumMod val="45000"/>
+                <a:lumOff val="55000"/>
+              </a:schemeClr>
+            </a:gs>
+            <a:gs pos="100000">
+              <a:schemeClr val="accent1">
+                <a:lumMod val="30000"/>
+                <a:lumOff val="70000"/>
+              </a:schemeClr>
+            </a:gs>
+          </a:gsLst>
+          <a:lin ang="5400000" scaled="1"/>
+        </a:gradFill>
+        <a:effectLst/>
+      </p:bgPr>
+    </p:bg>
     <p:spTree>
       <p:nvGrpSpPr>
         <p:cNvPr id="1" name=""/>
@@ -15126,6 +15540,34 @@
 <file path=ppt/slides/slide4.xml><?xml version="1.0" encoding="utf-8"?>
 <p:sld xmlns:a="http://schemas.openxmlformats.org/drawingml/2006/main" xmlns:r="http://schemas.openxmlformats.org/officeDocument/2006/relationships" xmlns:p="http://schemas.openxmlformats.org/presentationml/2006/main">
   <p:cSld>
+    <p:bg>
+      <p:bgPr>
+        <a:gradFill>
+          <a:gsLst>
+            <a:gs pos="74000">
+              <a:schemeClr val="accent1">
+                <a:lumMod val="45000"/>
+                <a:lumOff val="55000"/>
+              </a:schemeClr>
+            </a:gs>
+            <a:gs pos="83000">
+              <a:schemeClr val="accent1">
+                <a:lumMod val="45000"/>
+                <a:lumOff val="55000"/>
+              </a:schemeClr>
+            </a:gs>
+            <a:gs pos="100000">
+              <a:schemeClr val="accent1">
+                <a:lumMod val="30000"/>
+                <a:lumOff val="70000"/>
+              </a:schemeClr>
+            </a:gs>
+          </a:gsLst>
+          <a:lin ang="5400000" scaled="1"/>
+        </a:gradFill>
+        <a:effectLst/>
+      </p:bgPr>
+    </p:bg>
     <p:spTree>
       <p:nvGrpSpPr>
         <p:cNvPr id="1" name=""/>
@@ -15186,6 +15628,34 @@
 <file path=ppt/slides/slide5.xml><?xml version="1.0" encoding="utf-8"?>
 <p:sld xmlns:a="http://schemas.openxmlformats.org/drawingml/2006/main" xmlns:r="http://schemas.openxmlformats.org/officeDocument/2006/relationships" xmlns:p="http://schemas.openxmlformats.org/presentationml/2006/main">
   <p:cSld>
+    <p:bg>
+      <p:bgPr>
+        <a:gradFill>
+          <a:gsLst>
+            <a:gs pos="74000">
+              <a:schemeClr val="accent1">
+                <a:lumMod val="45000"/>
+                <a:lumOff val="55000"/>
+              </a:schemeClr>
+            </a:gs>
+            <a:gs pos="83000">
+              <a:schemeClr val="accent1">
+                <a:lumMod val="45000"/>
+                <a:lumOff val="55000"/>
+              </a:schemeClr>
+            </a:gs>
+            <a:gs pos="100000">
+              <a:schemeClr val="accent1">
+                <a:lumMod val="30000"/>
+                <a:lumOff val="70000"/>
+              </a:schemeClr>
+            </a:gs>
+          </a:gsLst>
+          <a:lin ang="5400000" scaled="1"/>
+        </a:gradFill>
+        <a:effectLst/>
+      </p:bgPr>
+    </p:bg>
     <p:spTree>
       <p:nvGrpSpPr>
         <p:cNvPr id="1" name=""/>
@@ -15246,6 +15716,40 @@
 <file path=ppt/slides/slide6.xml><?xml version="1.0" encoding="utf-8"?>
 <p:sld xmlns:a="http://schemas.openxmlformats.org/drawingml/2006/main" xmlns:r="http://schemas.openxmlformats.org/officeDocument/2006/relationships" xmlns:p="http://schemas.openxmlformats.org/presentationml/2006/main">
   <p:cSld>
+    <p:bg>
+      <p:bgPr>
+        <a:gradFill>
+          <a:gsLst>
+            <a:gs pos="0">
+              <a:schemeClr val="accent1">
+                <a:lumMod val="5000"/>
+                <a:lumOff val="95000"/>
+              </a:schemeClr>
+            </a:gs>
+            <a:gs pos="74000">
+              <a:schemeClr val="accent1">
+                <a:lumMod val="45000"/>
+                <a:lumOff val="55000"/>
+              </a:schemeClr>
+            </a:gs>
+            <a:gs pos="83000">
+              <a:schemeClr val="accent1">
+                <a:lumMod val="45000"/>
+                <a:lumOff val="55000"/>
+              </a:schemeClr>
+            </a:gs>
+            <a:gs pos="100000">
+              <a:schemeClr val="accent1">
+                <a:lumMod val="30000"/>
+                <a:lumOff val="70000"/>
+              </a:schemeClr>
+            </a:gs>
+          </a:gsLst>
+          <a:lin ang="5400000" scaled="1"/>
+        </a:gradFill>
+        <a:effectLst/>
+      </p:bgPr>
+    </p:bg>
     <p:spTree>
       <p:nvGrpSpPr>
         <p:cNvPr id="1" name=""/>
@@ -15260,75 +15764,340 @@
           <a:chExt cx="0" cy="0"/>
         </a:xfrm>
       </p:grpSpPr>
-      <p:sp>
-        <p:nvSpPr>
-          <p:cNvPr id="2" name="Title 1">
+      <p:pic>
+        <p:nvPicPr>
+          <p:cNvPr id="8" name="Picture 7">
             <a:extLst>
               <a:ext uri="{FF2B5EF4-FFF2-40B4-BE49-F238E27FC236}">
-                <a16:creationId xmlns:a16="http://schemas.microsoft.com/office/drawing/2014/main" id="{3E6838F1-6D03-AA00-066D-1AB806536982}"/>
+                <a16:creationId xmlns:a16="http://schemas.microsoft.com/office/drawing/2014/main" id="{CE46FC27-6C6F-5D07-7214-E658220CB1C9}"/>
               </a:ext>
             </a:extLst>
           </p:cNvPr>
-          <p:cNvSpPr>
-            <a:spLocks noGrp="1"/>
-          </p:cNvSpPr>
-          <p:nvPr>
-            <p:ph type="title"/>
-          </p:nvPr>
-        </p:nvSpPr>
+          <p:cNvPicPr>
+            <a:picLocks noChangeAspect="1"/>
+          </p:cNvPicPr>
+          <p:nvPr/>
+        </p:nvPicPr>
+        <p:blipFill>
+          <a:blip r:embed="rId2">
+            <a:extLst>
+              <a:ext uri="{28A0092B-C50C-407E-A947-70E740481C1C}">
+                <a14:useLocalDpi xmlns:a14="http://schemas.microsoft.com/office/drawing/2010/main" val="0"/>
+              </a:ext>
+            </a:extLst>
+          </a:blip>
+          <a:stretch>
+            <a:fillRect/>
+          </a:stretch>
+        </p:blipFill>
         <p:spPr>
           <a:xfrm>
-            <a:off x="4119716" y="2370667"/>
-            <a:ext cx="5860898" cy="1822514"/>
+            <a:off x="1686560" y="0"/>
+            <a:ext cx="8696960" cy="6858000"/>
           </a:xfrm>
+          <a:prstGeom prst="rect">
+            <a:avLst/>
+          </a:prstGeom>
         </p:spPr>
-        <p:txBody>
-          <a:bodyPr/>
-          <a:lstStyle/>
-          <a:p>
-            <a:r>
-              <a:rPr lang="en-US" sz="7800" dirty="0">
-                <a:latin typeface="Times New Roman" panose="02020603050405020304" pitchFamily="18" charset="0"/>
-                <a:cs typeface="Times New Roman" panose="02020603050405020304" pitchFamily="18" charset="0"/>
-              </a:rPr>
-              <a:t>Thank you!</a:t>
-            </a:r>
-            <a:endParaRPr lang="en-IN" sz="7800" dirty="0">
-              <a:latin typeface="Times New Roman" panose="02020603050405020304" pitchFamily="18" charset="0"/>
-              <a:cs typeface="Times New Roman" panose="02020603050405020304" pitchFamily="18" charset="0"/>
-            </a:endParaRPr>
-          </a:p>
-        </p:txBody>
-      </p:sp>
-      <p:sp>
-        <p:nvSpPr>
-          <p:cNvPr id="3" name="Text Placeholder 2">
+      </p:pic>
+    </p:spTree>
+    <p:extLst>
+      <p:ext uri="{BB962C8B-B14F-4D97-AF65-F5344CB8AC3E}">
+        <p14:creationId xmlns:p14="http://schemas.microsoft.com/office/powerpoint/2010/main" val="459202246"/>
+      </p:ext>
+    </p:extLst>
+  </p:cSld>
+  <p:clrMapOvr>
+    <a:masterClrMapping/>
+  </p:clrMapOvr>
+</p:sld>
+</file>
+
+<file path=ppt/slides/slide7.xml><?xml version="1.0" encoding="utf-8"?>
+<p:sld xmlns:a="http://schemas.openxmlformats.org/drawingml/2006/main" xmlns:r="http://schemas.openxmlformats.org/officeDocument/2006/relationships" xmlns:p="http://schemas.openxmlformats.org/presentationml/2006/main">
+  <p:cSld>
+    <p:bg>
+      <p:bgPr>
+        <a:gradFill>
+          <a:gsLst>
+            <a:gs pos="0">
+              <a:schemeClr val="accent1">
+                <a:lumMod val="5000"/>
+                <a:lumOff val="95000"/>
+              </a:schemeClr>
+            </a:gs>
+            <a:gs pos="74000">
+              <a:schemeClr val="accent1">
+                <a:lumMod val="45000"/>
+                <a:lumOff val="55000"/>
+              </a:schemeClr>
+            </a:gs>
+            <a:gs pos="83000">
+              <a:schemeClr val="accent1">
+                <a:lumMod val="45000"/>
+                <a:lumOff val="55000"/>
+              </a:schemeClr>
+            </a:gs>
+            <a:gs pos="100000">
+              <a:schemeClr val="accent1">
+                <a:lumMod val="30000"/>
+                <a:lumOff val="70000"/>
+              </a:schemeClr>
+            </a:gs>
+          </a:gsLst>
+          <a:lin ang="5400000" scaled="1"/>
+        </a:gradFill>
+        <a:effectLst/>
+      </p:bgPr>
+    </p:bg>
+    <p:spTree>
+      <p:nvGrpSpPr>
+        <p:cNvPr id="1" name=""/>
+        <p:cNvGrpSpPr/>
+        <p:nvPr/>
+      </p:nvGrpSpPr>
+      <p:grpSpPr>
+        <a:xfrm>
+          <a:off x="0" y="0"/>
+          <a:ext cx="0" cy="0"/>
+          <a:chOff x="0" y="0"/>
+          <a:chExt cx="0" cy="0"/>
+        </a:xfrm>
+      </p:grpSpPr>
+      <p:pic>
+        <p:nvPicPr>
+          <p:cNvPr id="3" name="Picture 2">
             <a:extLst>
               <a:ext uri="{FF2B5EF4-FFF2-40B4-BE49-F238E27FC236}">
-                <a16:creationId xmlns:a16="http://schemas.microsoft.com/office/drawing/2014/main" id="{7E71E8CE-37A5-AC7E-AB3C-02CAC0C0DC91}"/>
+                <a16:creationId xmlns:a16="http://schemas.microsoft.com/office/drawing/2014/main" id="{A6D4619D-678F-9175-7B8F-5CFBD6AEDB85}"/>
               </a:ext>
             </a:extLst>
           </p:cNvPr>
-          <p:cNvSpPr>
-            <a:spLocks noGrp="1"/>
-          </p:cNvSpPr>
-          <p:nvPr>
-            <p:ph type="body" idx="1"/>
-          </p:nvPr>
-        </p:nvSpPr>
-        <p:spPr/>
-        <p:txBody>
-          <a:bodyPr/>
-          <a:lstStyle/>
-          <a:p>
-            <a:endParaRPr lang="en-IN"/>
-          </a:p>
-        </p:txBody>
-      </p:sp>
+          <p:cNvPicPr>
+            <a:picLocks noChangeAspect="1"/>
+          </p:cNvPicPr>
+          <p:nvPr/>
+        </p:nvPicPr>
+        <p:blipFill>
+          <a:blip r:embed="rId2">
+            <a:extLst>
+              <a:ext uri="{28A0092B-C50C-407E-A947-70E740481C1C}">
+                <a14:useLocalDpi xmlns:a14="http://schemas.microsoft.com/office/drawing/2010/main" val="0"/>
+              </a:ext>
+            </a:extLst>
+          </a:blip>
+          <a:stretch>
+            <a:fillRect/>
+          </a:stretch>
+        </p:blipFill>
+        <p:spPr>
+          <a:xfrm>
+            <a:off x="1706880" y="0"/>
+            <a:ext cx="8635999" cy="6858000"/>
+          </a:xfrm>
+          <a:prstGeom prst="rect">
+            <a:avLst/>
+          </a:prstGeom>
+        </p:spPr>
+      </p:pic>
     </p:spTree>
     <p:extLst>
       <p:ext uri="{BB962C8B-B14F-4D97-AF65-F5344CB8AC3E}">
-        <p14:creationId xmlns:p14="http://schemas.microsoft.com/office/powerpoint/2010/main" val="2285915830"/>
+        <p14:creationId xmlns:p14="http://schemas.microsoft.com/office/powerpoint/2010/main" val="306189067"/>
+      </p:ext>
+    </p:extLst>
+  </p:cSld>
+  <p:clrMapOvr>
+    <a:masterClrMapping/>
+  </p:clrMapOvr>
+</p:sld>
+</file>
+
+<file path=ppt/slides/slide8.xml><?xml version="1.0" encoding="utf-8"?>
+<p:sld xmlns:a="http://schemas.openxmlformats.org/drawingml/2006/main" xmlns:r="http://schemas.openxmlformats.org/officeDocument/2006/relationships" xmlns:p="http://schemas.openxmlformats.org/presentationml/2006/main">
+  <p:cSld>
+    <p:bg>
+      <p:bgPr>
+        <a:gradFill>
+          <a:gsLst>
+            <a:gs pos="0">
+              <a:schemeClr val="accent1">
+                <a:lumMod val="5000"/>
+                <a:lumOff val="95000"/>
+              </a:schemeClr>
+            </a:gs>
+            <a:gs pos="74000">
+              <a:schemeClr val="accent1">
+                <a:lumMod val="45000"/>
+                <a:lumOff val="55000"/>
+              </a:schemeClr>
+            </a:gs>
+            <a:gs pos="83000">
+              <a:schemeClr val="accent1">
+                <a:lumMod val="45000"/>
+                <a:lumOff val="55000"/>
+              </a:schemeClr>
+            </a:gs>
+            <a:gs pos="100000">
+              <a:schemeClr val="accent1">
+                <a:lumMod val="30000"/>
+                <a:lumOff val="70000"/>
+              </a:schemeClr>
+            </a:gs>
+          </a:gsLst>
+          <a:lin ang="5400000" scaled="1"/>
+        </a:gradFill>
+        <a:effectLst/>
+      </p:bgPr>
+    </p:bg>
+    <p:spTree>
+      <p:nvGrpSpPr>
+        <p:cNvPr id="1" name=""/>
+        <p:cNvGrpSpPr/>
+        <p:nvPr/>
+      </p:nvGrpSpPr>
+      <p:grpSpPr>
+        <a:xfrm>
+          <a:off x="0" y="0"/>
+          <a:ext cx="0" cy="0"/>
+          <a:chOff x="0" y="0"/>
+          <a:chExt cx="0" cy="0"/>
+        </a:xfrm>
+      </p:grpSpPr>
+      <p:pic>
+        <p:nvPicPr>
+          <p:cNvPr id="7" name="Picture 6">
+            <a:extLst>
+              <a:ext uri="{FF2B5EF4-FFF2-40B4-BE49-F238E27FC236}">
+                <a16:creationId xmlns:a16="http://schemas.microsoft.com/office/drawing/2014/main" id="{3BE7C79C-34C5-8395-8CC2-DE3292F8CE6B}"/>
+              </a:ext>
+            </a:extLst>
+          </p:cNvPr>
+          <p:cNvPicPr>
+            <a:picLocks noChangeAspect="1"/>
+          </p:cNvPicPr>
+          <p:nvPr/>
+        </p:nvPicPr>
+        <p:blipFill>
+          <a:blip r:embed="rId2"/>
+          <a:stretch>
+            <a:fillRect/>
+          </a:stretch>
+        </p:blipFill>
+        <p:spPr>
+          <a:xfrm>
+            <a:off x="210481" y="575864"/>
+            <a:ext cx="11803122" cy="5706271"/>
+          </a:xfrm>
+          <a:prstGeom prst="rect">
+            <a:avLst/>
+          </a:prstGeom>
+        </p:spPr>
+      </p:pic>
+    </p:spTree>
+    <p:extLst>
+      <p:ext uri="{BB962C8B-B14F-4D97-AF65-F5344CB8AC3E}">
+        <p14:creationId xmlns:p14="http://schemas.microsoft.com/office/powerpoint/2010/main" val="687635378"/>
+      </p:ext>
+    </p:extLst>
+  </p:cSld>
+  <p:clrMapOvr>
+    <a:masterClrMapping/>
+  </p:clrMapOvr>
+</p:sld>
+</file>
+
+<file path=ppt/slides/slide9.xml><?xml version="1.0" encoding="utf-8"?>
+<p:sld xmlns:a="http://schemas.openxmlformats.org/drawingml/2006/main" xmlns:r="http://schemas.openxmlformats.org/officeDocument/2006/relationships" xmlns:p="http://schemas.openxmlformats.org/presentationml/2006/main">
+  <p:cSld>
+    <p:bg>
+      <p:bgPr>
+        <a:gradFill>
+          <a:gsLst>
+            <a:gs pos="0">
+              <a:schemeClr val="accent1">
+                <a:lumMod val="5000"/>
+                <a:lumOff val="95000"/>
+              </a:schemeClr>
+            </a:gs>
+            <a:gs pos="74000">
+              <a:schemeClr val="accent1">
+                <a:lumMod val="45000"/>
+                <a:lumOff val="55000"/>
+              </a:schemeClr>
+            </a:gs>
+            <a:gs pos="83000">
+              <a:schemeClr val="accent1">
+                <a:lumMod val="45000"/>
+                <a:lumOff val="55000"/>
+              </a:schemeClr>
+            </a:gs>
+            <a:gs pos="100000">
+              <a:schemeClr val="accent1">
+                <a:lumMod val="30000"/>
+                <a:lumOff val="70000"/>
+              </a:schemeClr>
+            </a:gs>
+          </a:gsLst>
+          <a:lin ang="5400000" scaled="1"/>
+        </a:gradFill>
+        <a:effectLst/>
+      </p:bgPr>
+    </p:bg>
+    <p:spTree>
+      <p:nvGrpSpPr>
+        <p:cNvPr id="1" name=""/>
+        <p:cNvGrpSpPr/>
+        <p:nvPr/>
+      </p:nvGrpSpPr>
+      <p:grpSpPr>
+        <a:xfrm>
+          <a:off x="0" y="0"/>
+          <a:ext cx="0" cy="0"/>
+          <a:chOff x="0" y="0"/>
+          <a:chExt cx="0" cy="0"/>
+        </a:xfrm>
+      </p:grpSpPr>
+      <p:pic>
+        <p:nvPicPr>
+          <p:cNvPr id="3" name="Picture 2">
+            <a:extLst>
+              <a:ext uri="{FF2B5EF4-FFF2-40B4-BE49-F238E27FC236}">
+                <a16:creationId xmlns:a16="http://schemas.microsoft.com/office/drawing/2014/main" id="{14EDFC30-2E0D-083A-7843-4A87C114868E}"/>
+              </a:ext>
+            </a:extLst>
+          </p:cNvPr>
+          <p:cNvPicPr>
+            <a:picLocks noChangeAspect="1"/>
+          </p:cNvPicPr>
+          <p:nvPr/>
+        </p:nvPicPr>
+        <p:blipFill>
+          <a:blip r:embed="rId2">
+            <a:extLst>
+              <a:ext uri="{28A0092B-C50C-407E-A947-70E740481C1C}">
+                <a14:useLocalDpi xmlns:a14="http://schemas.microsoft.com/office/drawing/2010/main" val="0"/>
+              </a:ext>
+            </a:extLst>
+          </a:blip>
+          <a:stretch>
+            <a:fillRect/>
+          </a:stretch>
+        </p:blipFill>
+        <p:spPr>
+          <a:xfrm>
+            <a:off x="1341120" y="0"/>
+            <a:ext cx="9083040" cy="6858000"/>
+          </a:xfrm>
+          <a:prstGeom prst="rect">
+            <a:avLst/>
+          </a:prstGeom>
+        </p:spPr>
+      </p:pic>
+    </p:spTree>
+    <p:extLst>
+      <p:ext uri="{BB962C8B-B14F-4D97-AF65-F5344CB8AC3E}">
+        <p14:creationId xmlns:p14="http://schemas.microsoft.com/office/powerpoint/2010/main" val="3255910363"/>
       </p:ext>
     </p:extLst>
   </p:cSld>
